--- a/gallery/pptx/fixtures/06-text-runs.pptx
+++ b/gallery/pptx/fixtures/06-text-runs.pptx
@@ -115,7 +115,7 @@
                 </a:solidFill>
                 <a:latin typeface="Calibri"/>
               </a:rPr>
-              <a:t>Hello </a:t>
+              <a:t xml:space="preserve">Hello </a:t>
             </a:r>
             <a:r>
               <a:rPr lang="en-US" sz="4000" b="1" dirty="0">
@@ -124,7 +124,7 @@
                 </a:solidFill>
                 <a:latin typeface="Calibri"/>
               </a:rPr>
-              <a:t>World</a:t>
+              <a:t xml:space="preserve">World</a:t>
             </a:r>
           </a:p>
         </p:txBody>
@@ -157,7 +157,7 @@
                 </a:solidFill>
                 <a:latin typeface="Calibri"/>
               </a:rPr>
-              <a:t>Regular, </a:t>
+              <a:t xml:space="preserve">Regular, </a:t>
             </a:r>
             <a:r>
               <a:rPr lang="en-US" sz="2400" i="1" dirty="0">
@@ -166,7 +166,7 @@
                 </a:solidFill>
                 <a:latin typeface="Calibri"/>
               </a:rPr>
-              <a:t>italic</a:t>
+              <a:t xml:space="preserve">italic</a:t>
             </a:r>
             <a:r>
               <a:rPr lang="en-US" sz="2400" dirty="0">
@@ -175,7 +175,7 @@
                 </a:solidFill>
                 <a:latin typeface="Calibri"/>
               </a:rPr>
-              <a:t>, and </a:t>
+              <a:t xml:space="preserve">, and </a:t>
             </a:r>
             <a:r>
               <a:rPr lang="en-US" sz="2400" b="1" dirty="0">
@@ -184,7 +184,7 @@
                 </a:solidFill>
                 <a:latin typeface="Calibri"/>
               </a:rPr>
-              <a:t>bold accent</a:t>
+              <a:t xml:space="preserve">bold accent</a:t>
             </a:r>
           </a:p>
           <a:p>
@@ -196,7 +196,7 @@
                 </a:solidFill>
                 <a:latin typeface="Calibri"/>
               </a:rPr>
-              <a:t>Second paragraph with theme color.</a:t>
+              <a:t xml:space="preserve">Second paragraph with theme color.</a:t>
             </a:r>
           </a:p>
         </p:txBody>
